--- a/examples/ppt/shapes/shapes-effects.pptx
+++ b/examples/ppt/shapes/shapes-effects.pptx
@@ -5,11 +5,11 @@
     <p:sldMasterId xmlns:r="http://schemas.openxmlformats.org/officeDocument/2006/relationships" id="2147483648" r:id="rId1"/>
   </p:sldMasterIdLst>
   <p:sldIdLst>
-    <p:sldId id="256" r:id="R2e4d237089a94097"/>
-    <p:sldId id="257" r:id="Rf7320797d17d4853"/>
-    <p:sldId id="258" r:id="R164c94939e0a4bbb"/>
-    <p:sldId id="259" r:id="R5b51fee37ae64b8f"/>
-    <p:sldId id="260" r:id="R24991091b34b4342"/>
+    <p:sldId id="256" r:id="Rb7ab14edb08548de"/>
+    <p:sldId id="257" r:id="R996e1d9dd2cd413c"/>
+    <p:sldId id="258" r:id="R2e25e3d1f06344e7"/>
+    <p:sldId id="259" r:id="R8547defd96dc48df"/>
+    <p:sldId id="260" r:id="R22656e8a11f54910"/>
   </p:sldIdLst>
   <p:sldSz cx="12192000" cy="6858000"/>
   <p:notesSz cx="6858000" cy="9144000"/>
@@ -284,7 +284,7 @@
 </file>
 
 <file path=ppt/slideMasters/slideMaster1.xml><?xml version="1.0" encoding="utf-8"?>
-<p:sldMaster xmlns:p="http://schemas.openxmlformats.org/presentationml/2006/main">
+<p:sldMaster xmlns:r="http://schemas.openxmlformats.org/officeDocument/2006/relationships" xmlns:p="http://schemas.openxmlformats.org/presentationml/2006/main">
   <p:cSld>
     <p:spTree>
       <p:nvGrpSpPr>
@@ -318,8 +318,8 @@
       <p:grpSpPr/>
       <p:sp>
         <p:nvSpPr>
-          <p:cNvPr id="10000" name="TextBox 1"/>
-          <p:cNvSpPr/>
+          <p:cNvPr id="100000" name="TextBox 1"/>
+          <p:cNvSpPr txBox="1"/>
           <p:nvPr/>
         </p:nvSpPr>
         <p:spPr>
@@ -344,8 +344,8 @@
       </p:sp>
       <p:sp>
         <p:nvSpPr>
-          <p:cNvPr id="10001" name="TextBox 2"/>
-          <p:cNvSpPr/>
+          <p:cNvPr id="100001" name="TextBox 2"/>
+          <p:cNvSpPr txBox="1"/>
           <p:nvPr/>
         </p:nvSpPr>
         <p:spPr>
@@ -375,8 +375,8 @@
       </p:sp>
       <p:sp>
         <p:nvSpPr>
-          <p:cNvPr id="10002" name="TextBox 3"/>
-          <p:cNvSpPr/>
+          <p:cNvPr id="100002" name="TextBox 3"/>
+          <p:cNvSpPr txBox="1"/>
           <p:nvPr/>
         </p:nvSpPr>
         <p:spPr>
@@ -401,8 +401,8 @@
       </p:sp>
       <p:sp>
         <p:nvSpPr>
-          <p:cNvPr id="10003" name="TextBox 4"/>
-          <p:cNvSpPr/>
+          <p:cNvPr id="100003" name="TextBox 4"/>
+          <p:cNvSpPr txBox="1"/>
           <p:nvPr/>
         </p:nvSpPr>
         <p:spPr>
@@ -432,8 +432,8 @@
       </p:sp>
       <p:sp>
         <p:nvSpPr>
-          <p:cNvPr id="10004" name="TextBox 5"/>
-          <p:cNvSpPr/>
+          <p:cNvPr id="100004" name="TextBox 5"/>
+          <p:cNvSpPr txBox="1"/>
           <p:nvPr/>
         </p:nvSpPr>
         <p:spPr>
@@ -458,8 +458,8 @@
       </p:sp>
       <p:sp>
         <p:nvSpPr>
-          <p:cNvPr id="10005" name="TextBox 6"/>
-          <p:cNvSpPr/>
+          <p:cNvPr id="100005" name="TextBox 6"/>
+          <p:cNvSpPr txBox="1"/>
           <p:nvPr/>
         </p:nvSpPr>
         <p:spPr>
@@ -489,8 +489,8 @@
       </p:sp>
       <p:sp>
         <p:nvSpPr>
-          <p:cNvPr id="10006" name="TextBox 7"/>
-          <p:cNvSpPr/>
+          <p:cNvPr id="100006" name="TextBox 7"/>
+          <p:cNvSpPr txBox="1"/>
           <p:nvPr/>
         </p:nvSpPr>
         <p:spPr>
@@ -530,8 +530,8 @@
       <p:grpSpPr/>
       <p:sp>
         <p:nvSpPr>
-          <p:cNvPr id="10007" name="TextBox 1"/>
-          <p:cNvSpPr/>
+          <p:cNvPr id="100007" name="TextBox 1"/>
+          <p:cNvSpPr txBox="1"/>
           <p:nvPr/>
         </p:nvSpPr>
         <p:spPr>
@@ -556,7 +556,7 @@
       </p:sp>
       <p:sp>
         <p:nvSpPr>
-          <p:cNvPr id="10008" name="TextBox 2"/>
+          <p:cNvPr id="100008" name="TextBox 2"/>
           <p:cNvSpPr/>
           <p:nvPr/>
         </p:nvSpPr>
@@ -589,7 +589,7 @@
       </p:sp>
       <p:sp>
         <p:nvSpPr>
-          <p:cNvPr id="10009" name="TextBox 3"/>
+          <p:cNvPr id="100009" name="TextBox 3"/>
           <p:cNvSpPr/>
           <p:nvPr/>
         </p:nvSpPr>
@@ -622,7 +622,7 @@
       </p:sp>
       <p:sp>
         <p:nvSpPr>
-          <p:cNvPr id="10010" name="TextBox 4"/>
+          <p:cNvPr id="100010" name="TextBox 4"/>
           <p:cNvSpPr/>
           <p:nvPr/>
         </p:nvSpPr>
@@ -655,7 +655,7 @@
       </p:sp>
       <p:sp>
         <p:nvSpPr>
-          <p:cNvPr id="10011" name="TextBox 5"/>
+          <p:cNvPr id="100011" name="TextBox 5"/>
           <p:cNvSpPr/>
           <p:nvPr/>
         </p:nvSpPr>
@@ -688,8 +688,8 @@
       </p:sp>
       <p:sp>
         <p:nvSpPr>
-          <p:cNvPr id="10012" name="TextBox 6"/>
-          <p:cNvSpPr/>
+          <p:cNvPr id="100012" name="TextBox 6"/>
+          <p:cNvSpPr txBox="1"/>
           <p:nvPr/>
         </p:nvSpPr>
         <p:spPr>
@@ -733,8 +733,8 @@
       <p:grpSpPr/>
       <p:sp>
         <p:nvSpPr>
-          <p:cNvPr id="10013" name="TextBox 1"/>
-          <p:cNvSpPr/>
+          <p:cNvPr id="100013" name="TextBox 1"/>
+          <p:cNvSpPr txBox="1"/>
           <p:nvPr/>
         </p:nvSpPr>
         <p:spPr>
@@ -759,7 +759,7 @@
       </p:sp>
       <p:sp>
         <p:nvSpPr>
-          <p:cNvPr id="10014" name="TextBox 2"/>
+          <p:cNvPr id="100014" name="TextBox 2"/>
           <p:cNvSpPr/>
           <p:nvPr/>
         </p:nvSpPr>
@@ -772,7 +772,7 @@
             <a:avLst/>
           </a:prstGeom>
           <a:blipFill xmlns:a="http://schemas.openxmlformats.org/drawingml/2006/main">
-            <a:blip xmlns:r="http://schemas.openxmlformats.org/officeDocument/2006/relationships" r:embed="R59b721a58bb24539"/>
+            <a:blip xmlns:r="http://schemas.openxmlformats.org/officeDocument/2006/relationships" r:embed="Rec4f695a6c184764"/>
             <a:stretch>
               <a:fillRect/>
             </a:stretch>
@@ -786,17 +786,12 @@
         <p:txBody>
           <a:bodyPr xmlns:a="http://schemas.openxmlformats.org/drawingml/2006/main"/>
           <a:lstStyle xmlns:a="http://schemas.openxmlformats.org/drawingml/2006/main"/>
-          <a:p xmlns:a="http://schemas.openxmlformats.org/drawingml/2006/main">
-            <a:r>
-              <a:rPr lang="en-US"/>
-              <a:t/>
-            </a:r>
-          </a:p>
-        </p:txBody>
-      </p:sp>
-      <p:sp>
-        <p:nvSpPr>
-          <p:cNvPr id="10015" name="TextBox 3"/>
+          <a:p xmlns:a="http://schemas.openxmlformats.org/drawingml/2006/main"/>
+        </p:txBody>
+      </p:sp>
+      <p:sp>
+        <p:nvSpPr>
+          <p:cNvPr id="100015" name="TextBox 3"/>
           <p:cNvSpPr/>
           <p:nvPr/>
         </p:nvSpPr>
@@ -809,31 +804,21 @@
             <a:avLst/>
           </a:prstGeom>
           <a:blipFill xmlns:a="http://schemas.openxmlformats.org/drawingml/2006/main">
-            <a:blip xmlns:r="http://schemas.openxmlformats.org/officeDocument/2006/relationships" r:embed="Rbfb1add0dd54451c"/>
+            <a:blip xmlns:r="http://schemas.openxmlformats.org/officeDocument/2006/relationships" r:embed="R5218bb05fce34e78"/>
             <a:stretch>
               <a:fillRect/>
             </a:stretch>
           </a:blipFill>
-          <a:ln xmlns:a="http://schemas.openxmlformats.org/drawingml/2006/main" w="9525">
-            <a:solidFill>
-              <a:srgbClr val="595959"/>
-            </a:solidFill>
-          </a:ln>
-        </p:spPr>
-        <p:txBody>
-          <a:bodyPr xmlns:a="http://schemas.openxmlformats.org/drawingml/2006/main"/>
-          <a:lstStyle xmlns:a="http://schemas.openxmlformats.org/drawingml/2006/main"/>
-          <a:p xmlns:a="http://schemas.openxmlformats.org/drawingml/2006/main">
-            <a:r>
-              <a:rPr lang="en-US"/>
-              <a:t/>
-            </a:r>
-          </a:p>
-        </p:txBody>
-      </p:sp>
-      <p:sp>
-        <p:nvSpPr>
-          <p:cNvPr id="10016" name="TextBox 4"/>
+        </p:spPr>
+        <p:txBody>
+          <a:bodyPr xmlns:a="http://schemas.openxmlformats.org/drawingml/2006/main"/>
+          <a:lstStyle xmlns:a="http://schemas.openxmlformats.org/drawingml/2006/main"/>
+          <a:p xmlns:a="http://schemas.openxmlformats.org/drawingml/2006/main"/>
+        </p:txBody>
+      </p:sp>
+      <p:sp>
+        <p:nvSpPr>
+          <p:cNvPr id="100016" name="TextBox 4"/>
           <p:cNvSpPr/>
           <p:nvPr/>
         </p:nvSpPr>
@@ -846,7 +831,7 @@
             <a:avLst/>
           </a:prstGeom>
           <a:blipFill xmlns:a="http://schemas.openxmlformats.org/drawingml/2006/main">
-            <a:blip xmlns:r="http://schemas.openxmlformats.org/officeDocument/2006/relationships" r:embed="R90573d5bc0c94b3d"/>
+            <a:blip xmlns:r="http://schemas.openxmlformats.org/officeDocument/2006/relationships" r:embed="R0e8a8f9f0dc248ea"/>
             <a:stretch>
               <a:fillRect/>
             </a:stretch>
@@ -860,18 +845,13 @@
         <p:txBody>
           <a:bodyPr xmlns:a="http://schemas.openxmlformats.org/drawingml/2006/main"/>
           <a:lstStyle xmlns:a="http://schemas.openxmlformats.org/drawingml/2006/main"/>
-          <a:p xmlns:a="http://schemas.openxmlformats.org/drawingml/2006/main">
-            <a:r>
-              <a:rPr lang="en-US"/>
-              <a:t/>
-            </a:r>
-          </a:p>
-        </p:txBody>
-      </p:sp>
-      <p:sp>
-        <p:nvSpPr>
-          <p:cNvPr id="10017" name="TextBox 5"/>
-          <p:cNvSpPr/>
+          <a:p xmlns:a="http://schemas.openxmlformats.org/drawingml/2006/main"/>
+        </p:txBody>
+      </p:sp>
+      <p:sp>
+        <p:nvSpPr>
+          <p:cNvPr id="100017" name="TextBox 5"/>
+          <p:cNvSpPr txBox="1"/>
           <p:nvPr/>
         </p:nvSpPr>
         <p:spPr>
@@ -915,8 +895,8 @@
       <p:grpSpPr/>
       <p:sp>
         <p:nvSpPr>
-          <p:cNvPr id="10018" name="TextBox 1"/>
-          <p:cNvSpPr/>
+          <p:cNvPr id="100018" name="TextBox 1"/>
+          <p:cNvSpPr txBox="1"/>
           <p:nvPr/>
         </p:nvSpPr>
         <p:spPr>
@@ -941,7 +921,7 @@
       </p:sp>
       <p:sp>
         <p:nvSpPr>
-          <p:cNvPr id="10019" name="TextBox 2"/>
+          <p:cNvPr id="100019" name="TextBox 2"/>
           <p:cNvSpPr/>
           <p:nvPr/>
         </p:nvSpPr>
@@ -956,10 +936,6 @@
           <a:solidFill xmlns:a="http://schemas.openxmlformats.org/drawingml/2006/main">
             <a:srgbClr val="4472C4"/>
           </a:solidFill>
-          <a:scene3d xmlns:a="http://schemas.openxmlformats.org/drawingml/2006/main">
-            <a:camera prst="orthographicFront"/>
-            <a:lightRig rig="threePt" dir="t"/>
-          </a:scene3d>
           <a:sp3d xmlns:a="http://schemas.openxmlformats.org/drawingml/2006/main">
             <a:bevelT w="76200" h="76200" prst="circle"/>
           </a:sp3d>
@@ -981,7 +957,7 @@
       </p:sp>
       <p:sp>
         <p:nvSpPr>
-          <p:cNvPr id="10020" name="TextBox 3"/>
+          <p:cNvPr id="100020" name="TextBox 3"/>
           <p:cNvSpPr/>
           <p:nvPr/>
         </p:nvSpPr>
@@ -996,10 +972,6 @@
           <a:solidFill xmlns:a="http://schemas.openxmlformats.org/drawingml/2006/main">
             <a:srgbClr val="E63946"/>
           </a:solidFill>
-          <a:scene3d xmlns:a="http://schemas.openxmlformats.org/drawingml/2006/main">
-            <a:camera prst="orthographicFront"/>
-            <a:lightRig rig="threePt" dir="t"/>
-          </a:scene3d>
           <a:sp3d xmlns:a="http://schemas.openxmlformats.org/drawingml/2006/main">
             <a:bevelT w="101600" h="50800" prst="angle"/>
             <a:bevelB w="50800" h="50800" prst="circle"/>
@@ -1022,7 +994,7 @@
       </p:sp>
       <p:sp>
         <p:nvSpPr>
-          <p:cNvPr id="10021" name="TextBox 4"/>
+          <p:cNvPr id="100021" name="TextBox 4"/>
           <p:cNvSpPr/>
           <p:nvPr/>
         </p:nvSpPr>
@@ -1037,10 +1009,6 @@
           <a:solidFill xmlns:a="http://schemas.openxmlformats.org/drawingml/2006/main">
             <a:srgbClr val="2A9D8F"/>
           </a:solidFill>
-          <a:scene3d xmlns:a="http://schemas.openxmlformats.org/drawingml/2006/main">
-            <a:camera prst="orthographicFront"/>
-            <a:lightRig rig="threePt" dir="t"/>
-          </a:scene3d>
           <a:sp3d xmlns:a="http://schemas.openxmlformats.org/drawingml/2006/main" extrusionH="177800">
             <a:bevelT w="76200" h="76200" prst="softRound"/>
           </a:sp3d>
@@ -1062,7 +1030,7 @@
       </p:sp>
       <p:sp>
         <p:nvSpPr>
-          <p:cNvPr id="10022" name="TextBox 5"/>
+          <p:cNvPr id="100022" name="TextBox 5"/>
           <p:cNvSpPr/>
           <p:nvPr/>
         </p:nvSpPr>
@@ -1102,7 +1070,7 @@
       </p:sp>
       <p:sp>
         <p:nvSpPr>
-          <p:cNvPr id="10023" name="TextBox 6"/>
+          <p:cNvPr id="100023" name="TextBox 6"/>
           <p:cNvSpPr/>
           <p:nvPr/>
         </p:nvSpPr>
@@ -1142,7 +1110,7 @@
       </p:sp>
       <p:sp>
         <p:nvSpPr>
-          <p:cNvPr id="10024" name="TextBox 7"/>
+          <p:cNvPr id="100024" name="TextBox 7"/>
           <p:cNvSpPr/>
           <p:nvPr/>
         </p:nvSpPr>
@@ -1197,7 +1165,7 @@
       <p:grpSpPr/>
       <p:sp>
         <p:nvSpPr>
-          <p:cNvPr id="10031" name="back"/>
+          <p:cNvPr id="100031" name="back"/>
           <p:cNvSpPr/>
           <p:nvPr/>
         </p:nvSpPr>
@@ -1230,7 +1198,7 @@
       </p:sp>
       <p:sp>
         <p:nvSpPr>
-          <p:cNvPr id="10032" name="middle"/>
+          <p:cNvPr id="100032" name="middle"/>
           <p:cNvSpPr/>
           <p:nvPr/>
         </p:nvSpPr>
@@ -1263,7 +1231,7 @@
       </p:sp>
       <p:sp>
         <p:nvSpPr>
-          <p:cNvPr id="10033" name="front"/>
+          <p:cNvPr id="100033" name="front"/>
           <p:cNvSpPr/>
           <p:nvPr/>
         </p:nvSpPr>
@@ -1296,8 +1264,8 @@
       </p:sp>
       <p:sp>
         <p:nvSpPr>
-          <p:cNvPr id="10025" name="TextBox 1"/>
-          <p:cNvSpPr/>
+          <p:cNvPr id="100025" name="TextBox 1"/>
+          <p:cNvSpPr txBox="1"/>
           <p:nvPr/>
         </p:nvSpPr>
         <p:spPr>
@@ -1322,7 +1290,7 @@
       </p:sp>
       <p:sp>
         <p:nvSpPr>
-          <p:cNvPr id="10026" name="TextBox 2"/>
+          <p:cNvPr id="100026" name="TextBox 2"/>
           <p:cNvSpPr/>
           <p:nvPr/>
         </p:nvSpPr>
@@ -1358,7 +1326,7 @@
       </p:sp>
       <p:sp>
         <p:nvSpPr>
-          <p:cNvPr id="10027" name="TextBox 3"/>
+          <p:cNvPr id="100027" name="TextBox 3"/>
           <p:cNvSpPr/>
           <p:nvPr/>
         </p:nvSpPr>
@@ -1394,7 +1362,7 @@
       </p:sp>
       <p:sp>
         <p:nvSpPr>
-          <p:cNvPr id="10028" name="TextBox 4"/>
+          <p:cNvPr id="100028" name="TextBox 4"/>
           <p:cNvSpPr/>
           <p:nvPr/>
         </p:nvSpPr>
@@ -1430,8 +1398,8 @@
       </p:sp>
       <p:sp>
         <p:nvSpPr>
-          <p:cNvPr id="10029" name="cta-button">
-            <a:hlinkClick xmlns:r="http://schemas.openxmlformats.org/officeDocument/2006/relationships" xmlns:a="http://schemas.openxmlformats.org/drawingml/2006/main" r:id="Rd5f7fb8e1adb4186" tooltip="Open example.com"/>
+          <p:cNvPr id="100029" name="cta-button">
+            <a:hlinkClick xmlns:r="http://schemas.openxmlformats.org/officeDocument/2006/relationships" xmlns:a="http://schemas.openxmlformats.org/drawingml/2006/main" r:id="R4adc763a71c64ee8" tooltip="Open example.com"/>
           </p:cNvPr>
           <p:cNvSpPr/>
           <p:nvPr/>
@@ -1457,7 +1425,7 @@
                 <a:solidFill>
                   <a:srgbClr val="FFFFFF"/>
                 </a:solidFill>
-                <a:hlinkClick xmlns:r="http://schemas.openxmlformats.org/officeDocument/2006/relationships" r:id="Rd5f7fb8e1adb4186" tooltip="Open example.com"/>
+                <a:hlinkClick xmlns:r="http://schemas.openxmlformats.org/officeDocument/2006/relationships" r:id="R4adc763a71c64ee8" tooltip="Open example.com"/>
               </a:rPr>
               <a:t>Click me → example.com</a:t>
             </a:r>
@@ -1466,8 +1434,8 @@
       </p:sp>
       <p:sp>
         <p:nvSpPr>
-          <p:cNvPr id="10030" name="TextBox 6"/>
-          <p:cNvSpPr/>
+          <p:cNvPr id="100030" name="TextBox 6"/>
+          <p:cNvSpPr txBox="1"/>
           <p:nvPr/>
         </p:nvSpPr>
         <p:spPr>
